--- a/presentations/b18-application-modernization/B18_Application_Modernization_Narrated.pptx
+++ b/presentations/b18-application-modernization/B18_Application_Modernization_Narrated.pptx
@@ -185,7 +185,7 @@
     </p:spTree>
     <p:extLst>
       <p:ext uri="{BB962C8B-B14F-4D97-AF65-F5344CB8AC3E}">
-        <p14:creationId xmlns:p14="http://schemas.microsoft.com/office/powerpoint/2010/main" val="292181691"/>
+        <p14:creationId xmlns:p14="http://schemas.microsoft.com/office/powerpoint/2010/main" val="785306515"/>
       </p:ext>
     </p:extLst>
   </p:cSld>
@@ -2431,7 +2431,7 @@
             <a:hlinkClick r:id="" action="ppaction://media"/>
             <a:extLst>
               <a:ext uri="{FF2B5EF4-FFF2-40B4-BE49-F238E27FC236}">
-                <a16:creationId xmlns:a16="http://schemas.microsoft.com/office/drawing/2014/main" id="{661D4A1C-1D86-DB15-48D9-F0CE7C589DDD}"/>
+                <a16:creationId xmlns:a16="http://schemas.microsoft.com/office/drawing/2014/main" id="{EEB82BCD-602D-EDD7-B780-6D4FACFBCB87}"/>
               </a:ext>
             </a:extLst>
           </p:cNvPr>
@@ -2447,7 +2447,7 @@
                     <p:ext uri="{3AFAAA56-56D3-431D-BCD4-E75A35582382}">
                       <p173:tracksInfo xmlns:p173="http://schemas.microsoft.com/office/powerpoint/2017/3/main" displayLoc="slide">
                         <p173:trackLst>
-                          <p173:track id="{0608B1DD-EE62-4F9F-A85A-B40F8378F4D4}" label="English (captions)" lang="en-US" r:embed="rId6"/>
+                          <p173:track id="{F1CD8B54-F904-40EC-BF8C-EAED86CE4DF1}" label="English (captions)" lang="en-US" r:embed="rId6"/>
                         </p173:trackLst>
                       </p173:tracksInfo>
                     </p:ext>
@@ -2465,7 +2465,7 @@
         </p:blipFill>
         <p:spPr>
           <a:xfrm>
-            <a:off x="127000" y="6350000"/>
+            <a:off x="12446000" y="127000"/>
             <a:ext cx="304800" cy="304800"/>
           </a:xfrm>
           <a:prstGeom prst="rect">
@@ -3208,7 +3208,7 @@
             <a:hlinkClick r:id="" action="ppaction://media"/>
             <a:extLst>
               <a:ext uri="{FF2B5EF4-FFF2-40B4-BE49-F238E27FC236}">
-                <a16:creationId xmlns:a16="http://schemas.microsoft.com/office/drawing/2014/main" id="{BE98630F-4B1A-AB94-0BE3-5C1C1E1B45D5}"/>
+                <a16:creationId xmlns:a16="http://schemas.microsoft.com/office/drawing/2014/main" id="{B60B7B98-B5CC-B5F7-005E-5099278A8E91}"/>
               </a:ext>
             </a:extLst>
           </p:cNvPr>
@@ -3224,7 +3224,7 @@
                     <p:ext uri="{3AFAAA56-56D3-431D-BCD4-E75A35582382}">
                       <p173:tracksInfo xmlns:p173="http://schemas.microsoft.com/office/powerpoint/2017/3/main" displayLoc="slide">
                         <p173:trackLst>
-                          <p173:track id="{B171C585-F72A-44E4-AD00-43FCDE86B909}" label="English (captions)" lang="en-US" r:embed="rId9"/>
+                          <p173:track id="{81F46AD2-950B-4C2B-8051-0697CC5BC391}" label="English (captions)" lang="en-US" r:embed="rId9"/>
                         </p173:trackLst>
                       </p173:tracksInfo>
                     </p:ext>
@@ -3242,7 +3242,7 @@
         </p:blipFill>
         <p:spPr>
           <a:xfrm>
-            <a:off x="127000" y="6350000"/>
+            <a:off x="12446000" y="127000"/>
             <a:ext cx="304800" cy="304800"/>
           </a:xfrm>
           <a:prstGeom prst="rect">
@@ -4191,7 +4191,7 @@
             <a:hlinkClick r:id="" action="ppaction://media"/>
             <a:extLst>
               <a:ext uri="{FF2B5EF4-FFF2-40B4-BE49-F238E27FC236}">
-                <a16:creationId xmlns:a16="http://schemas.microsoft.com/office/drawing/2014/main" id="{42119107-F2F3-7D24-A8B0-12B6981CB6F5}"/>
+                <a16:creationId xmlns:a16="http://schemas.microsoft.com/office/drawing/2014/main" id="{A268BC35-0F92-19E1-F839-275EAD5193B0}"/>
               </a:ext>
             </a:extLst>
           </p:cNvPr>
@@ -4207,7 +4207,7 @@
                     <p:ext uri="{3AFAAA56-56D3-431D-BCD4-E75A35582382}">
                       <p173:tracksInfo xmlns:p173="http://schemas.microsoft.com/office/powerpoint/2017/3/main" displayLoc="slide">
                         <p173:trackLst>
-                          <p173:track id="{358B946E-EE42-467F-B0A0-6098D1307F94}" label="English (captions)" lang="en-US" r:embed="rId9"/>
+                          <p173:track id="{B52D0E14-0327-44AF-92C2-E76BB1B41392}" label="English (captions)" lang="en-US" r:embed="rId9"/>
                         </p173:trackLst>
                       </p173:tracksInfo>
                     </p:ext>
@@ -4225,7 +4225,7 @@
         </p:blipFill>
         <p:spPr>
           <a:xfrm>
-            <a:off x="127000" y="6350000"/>
+            <a:off x="12446000" y="127000"/>
             <a:ext cx="304800" cy="304800"/>
           </a:xfrm>
           <a:prstGeom prst="rect">
@@ -5538,7 +5538,7 @@
             <a:hlinkClick r:id="" action="ppaction://media"/>
             <a:extLst>
               <a:ext uri="{FF2B5EF4-FFF2-40B4-BE49-F238E27FC236}">
-                <a16:creationId xmlns:a16="http://schemas.microsoft.com/office/drawing/2014/main" id="{43EED16A-0AF4-24E2-FC83-F7E510248D8F}"/>
+                <a16:creationId xmlns:a16="http://schemas.microsoft.com/office/drawing/2014/main" id="{68F0BA6A-ED49-9444-DBA1-C4820BFBA7DA}"/>
               </a:ext>
             </a:extLst>
           </p:cNvPr>
@@ -5554,7 +5554,7 @@
                     <p:ext uri="{3AFAAA56-56D3-431D-BCD4-E75A35582382}">
                       <p173:tracksInfo xmlns:p173="http://schemas.microsoft.com/office/powerpoint/2017/3/main" displayLoc="slide">
                         <p173:trackLst>
-                          <p173:track id="{3A908AD0-8838-4241-B9A3-52E8C6ED0DF5}" label="English (captions)" lang="en-US" r:embed="rId9"/>
+                          <p173:track id="{F7AE3EB6-6086-4D3A-8FBB-7E01843FFB94}" label="English (captions)" lang="en-US" r:embed="rId9"/>
                         </p173:trackLst>
                       </p173:tracksInfo>
                     </p:ext>
@@ -5572,7 +5572,7 @@
         </p:blipFill>
         <p:spPr>
           <a:xfrm>
-            <a:off x="127000" y="6350000"/>
+            <a:off x="12446000" y="127000"/>
             <a:ext cx="304800" cy="304800"/>
           </a:xfrm>
           <a:prstGeom prst="rect">
@@ -6641,7 +6641,7 @@
             <a:hlinkClick r:id="" action="ppaction://media"/>
             <a:extLst>
               <a:ext uri="{FF2B5EF4-FFF2-40B4-BE49-F238E27FC236}">
-                <a16:creationId xmlns:a16="http://schemas.microsoft.com/office/drawing/2014/main" id="{049454D0-D192-6FD0-DD56-B5A08EFA7F09}"/>
+                <a16:creationId xmlns:a16="http://schemas.microsoft.com/office/drawing/2014/main" id="{23D38CBA-F510-C73F-AF68-D6CCD3D788B5}"/>
               </a:ext>
             </a:extLst>
           </p:cNvPr>
@@ -6657,7 +6657,7 @@
                     <p:ext uri="{3AFAAA56-56D3-431D-BCD4-E75A35582382}">
                       <p173:tracksInfo xmlns:p173="http://schemas.microsoft.com/office/powerpoint/2017/3/main" displayLoc="slide">
                         <p173:trackLst>
-                          <p173:track id="{B28936DD-8B9B-460F-8B82-6A29184A9359}" label="English (captions)" lang="en-US" r:embed="rId11"/>
+                          <p173:track id="{7583F63A-E6F6-42F0-86FA-C549B61CEDCC}" label="English (captions)" lang="en-US" r:embed="rId11"/>
                         </p173:trackLst>
                       </p173:tracksInfo>
                     </p:ext>
@@ -6675,7 +6675,7 @@
         </p:blipFill>
         <p:spPr>
           <a:xfrm>
-            <a:off x="127000" y="6350000"/>
+            <a:off x="12446000" y="127000"/>
             <a:ext cx="304800" cy="304800"/>
           </a:xfrm>
           <a:prstGeom prst="rect">
@@ -8680,7 +8680,7 @@
             <a:hlinkClick r:id="" action="ppaction://media"/>
             <a:extLst>
               <a:ext uri="{FF2B5EF4-FFF2-40B4-BE49-F238E27FC236}">
-                <a16:creationId xmlns:a16="http://schemas.microsoft.com/office/drawing/2014/main" id="{7DE65B72-0778-E758-8D69-802828E97582}"/>
+                <a16:creationId xmlns:a16="http://schemas.microsoft.com/office/drawing/2014/main" id="{958173D9-9E9A-C69C-84C4-8066EDEA215C}"/>
               </a:ext>
             </a:extLst>
           </p:cNvPr>
@@ -8696,7 +8696,7 @@
                     <p:ext uri="{3AFAAA56-56D3-431D-BCD4-E75A35582382}">
                       <p173:tracksInfo xmlns:p173="http://schemas.microsoft.com/office/powerpoint/2017/3/main" displayLoc="slide">
                         <p173:trackLst>
-                          <p173:track id="{727F7845-0CCB-4781-9D96-49F32D6D5BB5}" label="English (captions)" lang="en-US" r:embed="rId8"/>
+                          <p173:track id="{C0BBAC1B-3AE2-4D1E-B95A-5EE40A93112B}" label="English (captions)" lang="en-US" r:embed="rId8"/>
                         </p173:trackLst>
                       </p173:tracksInfo>
                     </p:ext>
@@ -8714,7 +8714,7 @@
         </p:blipFill>
         <p:spPr>
           <a:xfrm>
-            <a:off x="127000" y="6350000"/>
+            <a:off x="12446000" y="127000"/>
             <a:ext cx="304800" cy="304800"/>
           </a:xfrm>
           <a:prstGeom prst="rect">
@@ -9787,7 +9787,7 @@
             <a:hlinkClick r:id="" action="ppaction://media"/>
             <a:extLst>
               <a:ext uri="{FF2B5EF4-FFF2-40B4-BE49-F238E27FC236}">
-                <a16:creationId xmlns:a16="http://schemas.microsoft.com/office/drawing/2014/main" id="{B620ABB8-E5A0-A371-A73B-C366C9F58073}"/>
+                <a16:creationId xmlns:a16="http://schemas.microsoft.com/office/drawing/2014/main" id="{A56ACA24-BFBF-6756-07F8-A53F04DA24A6}"/>
               </a:ext>
             </a:extLst>
           </p:cNvPr>
@@ -9803,7 +9803,7 @@
                     <p:ext uri="{3AFAAA56-56D3-431D-BCD4-E75A35582382}">
                       <p173:tracksInfo xmlns:p173="http://schemas.microsoft.com/office/powerpoint/2017/3/main" displayLoc="slide">
                         <p173:trackLst>
-                          <p173:track id="{2D08612C-7D7A-4A03-8A94-1FEC20C817A7}" label="English (captions)" lang="en-US" r:embed="rId8"/>
+                          <p173:track id="{35CE1162-C515-4F3E-8ECD-434B83F26A66}" label="English (captions)" lang="en-US" r:embed="rId8"/>
                         </p173:trackLst>
                       </p173:tracksInfo>
                     </p:ext>
@@ -9821,7 +9821,7 @@
         </p:blipFill>
         <p:spPr>
           <a:xfrm>
-            <a:off x="127000" y="6350000"/>
+            <a:off x="12446000" y="127000"/>
             <a:ext cx="304800" cy="304800"/>
           </a:xfrm>
           <a:prstGeom prst="rect">
@@ -10582,7 +10582,7 @@
             <a:hlinkClick r:id="" action="ppaction://media"/>
             <a:extLst>
               <a:ext uri="{FF2B5EF4-FFF2-40B4-BE49-F238E27FC236}">
-                <a16:creationId xmlns:a16="http://schemas.microsoft.com/office/drawing/2014/main" id="{64C1BDA2-2713-E721-0A5F-3802A9B75778}"/>
+                <a16:creationId xmlns:a16="http://schemas.microsoft.com/office/drawing/2014/main" id="{BF8E8C05-5971-6445-4364-2A4019F7EBAD}"/>
               </a:ext>
             </a:extLst>
           </p:cNvPr>
@@ -10598,7 +10598,7 @@
                     <p:ext uri="{3AFAAA56-56D3-431D-BCD4-E75A35582382}">
                       <p173:tracksInfo xmlns:p173="http://schemas.microsoft.com/office/powerpoint/2017/3/main" displayLoc="slide">
                         <p173:trackLst>
-                          <p173:track id="{C9603BB1-14DA-4B06-A1F7-B59B3BB1CF33}" label="English (captions)" lang="en-US" r:embed="rId9"/>
+                          <p173:track id="{C953A616-4006-468D-84AE-52A5636233E2}" label="English (captions)" lang="en-US" r:embed="rId9"/>
                         </p173:trackLst>
                       </p173:tracksInfo>
                     </p:ext>
@@ -10616,7 +10616,7 @@
         </p:blipFill>
         <p:spPr>
           <a:xfrm>
-            <a:off x="127000" y="6350000"/>
+            <a:off x="12446000" y="127000"/>
             <a:ext cx="304800" cy="304800"/>
           </a:xfrm>
           <a:prstGeom prst="rect">
@@ -12843,7 +12843,7 @@
             <a:hlinkClick r:id="" action="ppaction://media"/>
             <a:extLst>
               <a:ext uri="{FF2B5EF4-FFF2-40B4-BE49-F238E27FC236}">
-                <a16:creationId xmlns:a16="http://schemas.microsoft.com/office/drawing/2014/main" id="{83EA2DDC-09BB-5214-0BE0-E0938F4661B0}"/>
+                <a16:creationId xmlns:a16="http://schemas.microsoft.com/office/drawing/2014/main" id="{5B842E67-AE1A-03D5-6B54-1E5227196030}"/>
               </a:ext>
             </a:extLst>
           </p:cNvPr>
@@ -12859,7 +12859,7 @@
                     <p:ext uri="{3AFAAA56-56D3-431D-BCD4-E75A35582382}">
                       <p173:tracksInfo xmlns:p173="http://schemas.microsoft.com/office/powerpoint/2017/3/main" displayLoc="slide">
                         <p173:trackLst>
-                          <p173:track id="{BA63313B-0830-470B-9E4F-B0DBFCABC1CB}" label="English (captions)" lang="en-US" r:embed="rId8"/>
+                          <p173:track id="{7C6ED5A4-B755-4584-9F9E-1FE616F2B227}" label="English (captions)" lang="en-US" r:embed="rId8"/>
                         </p173:trackLst>
                       </p173:tracksInfo>
                     </p:ext>
@@ -12877,7 +12877,7 @@
         </p:blipFill>
         <p:spPr>
           <a:xfrm>
-            <a:off x="127000" y="6350000"/>
+            <a:off x="12446000" y="127000"/>
             <a:ext cx="304800" cy="304800"/>
           </a:xfrm>
           <a:prstGeom prst="rect">
@@ -14417,7 +14417,7 @@
             <a:hlinkClick r:id="" action="ppaction://media"/>
             <a:extLst>
               <a:ext uri="{FF2B5EF4-FFF2-40B4-BE49-F238E27FC236}">
-                <a16:creationId xmlns:a16="http://schemas.microsoft.com/office/drawing/2014/main" id="{590F9E52-3006-A77A-8ECF-D42942364ACD}"/>
+                <a16:creationId xmlns:a16="http://schemas.microsoft.com/office/drawing/2014/main" id="{ACDA116B-DE60-093C-3DD2-33B1C0F33F2E}"/>
               </a:ext>
             </a:extLst>
           </p:cNvPr>
@@ -14433,7 +14433,7 @@
                     <p:ext uri="{3AFAAA56-56D3-431D-BCD4-E75A35582382}">
                       <p173:tracksInfo xmlns:p173="http://schemas.microsoft.com/office/powerpoint/2017/3/main" displayLoc="slide">
                         <p173:trackLst>
-                          <p173:track id="{CD8C1B62-5EA2-418E-BAC0-704F66A8E648}" label="English (captions)" lang="en-US" r:embed="rId9"/>
+                          <p173:track id="{4D688E35-08A2-4E41-A968-4F692114ECB9}" label="English (captions)" lang="en-US" r:embed="rId9"/>
                         </p173:trackLst>
                       </p173:tracksInfo>
                     </p:ext>
@@ -14451,7 +14451,7 @@
         </p:blipFill>
         <p:spPr>
           <a:xfrm>
-            <a:off x="127000" y="6350000"/>
+            <a:off x="12446000" y="127000"/>
             <a:ext cx="304800" cy="304800"/>
           </a:xfrm>
           <a:prstGeom prst="rect">
@@ -15194,7 +15194,7 @@
             <a:hlinkClick r:id="" action="ppaction://media"/>
             <a:extLst>
               <a:ext uri="{FF2B5EF4-FFF2-40B4-BE49-F238E27FC236}">
-                <a16:creationId xmlns:a16="http://schemas.microsoft.com/office/drawing/2014/main" id="{5AB99DBC-FDA4-3BE8-DEB4-0D49C9784699}"/>
+                <a16:creationId xmlns:a16="http://schemas.microsoft.com/office/drawing/2014/main" id="{4EAEE55A-B6BE-D2C6-8E8E-07E26F245CD5}"/>
               </a:ext>
             </a:extLst>
           </p:cNvPr>
@@ -15210,7 +15210,7 @@
                     <p:ext uri="{3AFAAA56-56D3-431D-BCD4-E75A35582382}">
                       <p173:tracksInfo xmlns:p173="http://schemas.microsoft.com/office/powerpoint/2017/3/main" displayLoc="slide">
                         <p173:trackLst>
-                          <p173:track id="{758BD22A-AEC3-4B3C-9039-35412BC3C10E}" label="English (captions)" lang="en-US" r:embed="rId9"/>
+                          <p173:track id="{7E5E5808-6B65-439F-8075-81AF5CCABCE0}" label="English (captions)" lang="en-US" r:embed="rId9"/>
                         </p173:trackLst>
                       </p173:tracksInfo>
                     </p:ext>
@@ -15228,7 +15228,7 @@
         </p:blipFill>
         <p:spPr>
           <a:xfrm>
-            <a:off x="127000" y="6350000"/>
+            <a:off x="12446000" y="127000"/>
             <a:ext cx="304800" cy="304800"/>
           </a:xfrm>
           <a:prstGeom prst="rect">
@@ -16371,7 +16371,7 @@
             <a:hlinkClick r:id="" action="ppaction://media"/>
             <a:extLst>
               <a:ext uri="{FF2B5EF4-FFF2-40B4-BE49-F238E27FC236}">
-                <a16:creationId xmlns:a16="http://schemas.microsoft.com/office/drawing/2014/main" id="{2E91CF0C-96EA-7C72-21E0-63E4CF544CF0}"/>
+                <a16:creationId xmlns:a16="http://schemas.microsoft.com/office/drawing/2014/main" id="{85F5B86A-F523-886C-65C0-D25C5355A40D}"/>
               </a:ext>
             </a:extLst>
           </p:cNvPr>
@@ -16387,7 +16387,7 @@
                     <p:ext uri="{3AFAAA56-56D3-431D-BCD4-E75A35582382}">
                       <p173:tracksInfo xmlns:p173="http://schemas.microsoft.com/office/powerpoint/2017/3/main" displayLoc="slide">
                         <p173:trackLst>
-                          <p173:track id="{B85C3391-0971-43C2-BF14-DA620BF6FA51}" label="English (captions)" lang="en-US" r:embed="rId10"/>
+                          <p173:track id="{85CA1515-1AFA-4089-A509-80F798305A88}" label="English (captions)" lang="en-US" r:embed="rId10"/>
                         </p173:trackLst>
                       </p173:tracksInfo>
                     </p:ext>
@@ -16405,7 +16405,7 @@
         </p:blipFill>
         <p:spPr>
           <a:xfrm>
-            <a:off x="127000" y="6350000"/>
+            <a:off x="12446000" y="127000"/>
             <a:ext cx="304800" cy="304800"/>
           </a:xfrm>
           <a:prstGeom prst="rect">
@@ -17736,7 +17736,7 @@
             <a:hlinkClick r:id="" action="ppaction://media"/>
             <a:extLst>
               <a:ext uri="{FF2B5EF4-FFF2-40B4-BE49-F238E27FC236}">
-                <a16:creationId xmlns:a16="http://schemas.microsoft.com/office/drawing/2014/main" id="{5714CE1D-E970-F1D1-0E65-BBD33F3554AE}"/>
+                <a16:creationId xmlns:a16="http://schemas.microsoft.com/office/drawing/2014/main" id="{A910A769-53BD-3097-ED7E-A92F08CFF097}"/>
               </a:ext>
             </a:extLst>
           </p:cNvPr>
@@ -17752,7 +17752,7 @@
                     <p:ext uri="{3AFAAA56-56D3-431D-BCD4-E75A35582382}">
                       <p173:tracksInfo xmlns:p173="http://schemas.microsoft.com/office/powerpoint/2017/3/main" displayLoc="slide">
                         <p173:trackLst>
-                          <p173:track id="{0864783B-AC5B-4F2B-A744-27A1C8AF52BC}" label="English (captions)" lang="en-US" r:embed="rId9"/>
+                          <p173:track id="{7CA98106-6292-49F1-B09F-EC5F4F5C4AB1}" label="English (captions)" lang="en-US" r:embed="rId9"/>
                         </p173:trackLst>
                       </p173:tracksInfo>
                     </p:ext>
@@ -17770,7 +17770,7 @@
         </p:blipFill>
         <p:spPr>
           <a:xfrm>
-            <a:off x="127000" y="6350000"/>
+            <a:off x="12446000" y="127000"/>
             <a:ext cx="304800" cy="304800"/>
           </a:xfrm>
           <a:prstGeom prst="rect">
